--- a/dist/초2/수학/자료와규칙/초2_수학_자료와규칙_02_표와그래프.pptx
+++ b/dist/초2/수학/자료와규칙/초2_수학_자료와규칙_02_표와그래프.pptx
@@ -121,13 +121,13 @@
   <p:extLst>
     <p:ext uri="{521415D9-36F7-43E2-AB2F-B90AF26B5E84}">
       <p14:sectionLst xmlns:p14="http://schemas.microsoft.com/office/powerpoint/2010/main">
-        <p14:section name="도입" id="{818cb734-df3c-142a-5f88-5de41f4ec487}">
+        <p14:section name="도입" id="{f646fc01-ff40-b610-175e-908760473dfa}">
           <p14:sldIdLst>
             <p14:sldId id="256"/>
             <p14:sldId id="257"/>
           </p14:sldIdLst>
         </p14:section>
-        <p14:section name="개념" id="{0a43de97-f31e-1520-1db5-4a97fa3b0e00}">
+        <p14:section name="개념" id="{846f67d8-1a78-f1a9-8834-769e750b6d57}">
           <p14:sldIdLst>
             <p14:sldId id="258"/>
             <p14:sldId id="259"/>
@@ -135,7 +135,7 @@
             <p14:sldId id="261"/>
           </p14:sldIdLst>
         </p14:section>
-        <p14:section name="연습" id="{7070356e-5e07-c8a8-4aa8-fd359a9a957d}">
+        <p14:section name="연습" id="{ea9913b4-7e60-0f46-05f7-23888af45121}">
           <p14:sldIdLst>
             <p14:sldId id="262"/>
             <p14:sldId id="263"/>
@@ -143,19 +143,19 @@
             <p14:sldId id="265"/>
           </p14:sldIdLst>
         </p14:section>
-        <p14:section name="확인" id="{15b00e68-0cc6-bd3d-14b9-12666a3a4a07}">
+        <p14:section name="확인" id="{3c691de9-c3ce-b1e9-30ad-489e9d6f20f0}">
           <p14:sldIdLst>
             <p14:sldId id="266"/>
             <p14:sldId id="267"/>
             <p14:sldId id="268"/>
           </p14:sldIdLst>
         </p14:section>
-        <p14:section name="정리" id="{dfecf280-e2a5-24d7-b5dc-bd10e4fcd25f}">
+        <p14:section name="정리" id="{60c3295a-83a9-c368-5fc2-d48a95ef6538}">
           <p14:sldIdLst>
             <p14:sldId id="269"/>
           </p14:sldIdLst>
         </p14:section>
-        <p14:section name="보충" id="{d93eb1da-15d8-0251-1529-6ae11ef676ec}">
+        <p14:section name="보충" id="{f60a09a3-b0fc-4a67-da34-96b93ce6f957}">
           <p14:sldIdLst>
             <p14:sldId id="270"/>
           </p14:sldIdLst>
@@ -9195,7 +9195,7 @@
         </p:nvSpPr>
         <p:spPr>
           <a:xfrm>
-            <a:off x="548640" y="2459736"/>
+            <a:off x="548640" y="2734056"/>
             <a:ext cx="566928" cy="566928"/>
           </a:xfrm>
           <a:prstGeom prst="roundRect">
@@ -9242,12 +9242,12 @@
         </p:nvSpPr>
         <p:spPr>
           <a:xfrm>
-            <a:off x="1344168" y="2476500"/>
-            <a:ext cx="533400" cy="533400"/>
+            <a:off x="1344168" y="2644140"/>
+            <a:ext cx="746760" cy="746760"/>
           </a:xfrm>
           <a:prstGeom prst="roundRect">
             <a:avLst>
-              <a:gd name="adj" fmla="val 24000"/>
+              <a:gd name="adj" fmla="val 17143"/>
             </a:avLst>
           </a:prstGeom>
           <a:solidFill>
@@ -9267,7 +9267,7 @@
               <a:buNone/>
             </a:pPr>
             <a:r>
-              <a:rPr lang="ko-KR" altLang="en-US" sz="2300" b="1" dirty="0">
+              <a:rPr lang="ko-KR" altLang="en-US" sz="3200" b="1" dirty="0">
                 <a:solidFill>
                   <a:srgbClr val="1F2937"/>
                 </a:solidFill>
@@ -9277,7 +9277,7 @@
               </a:rPr>
               <a:t>●</a:t>
             </a:r>
-            <a:endParaRPr lang="ko-KR" sz="2300" dirty="0"/>
+            <a:endParaRPr lang="ko-KR" sz="3200" dirty="0"/>
           </a:p>
         </p:txBody>
       </p:sp>
@@ -9289,12 +9289,12 @@
         </p:nvSpPr>
         <p:spPr>
           <a:xfrm>
-            <a:off x="2078736" y="2476500"/>
-            <a:ext cx="533400" cy="533400"/>
+            <a:off x="2292096" y="2644140"/>
+            <a:ext cx="746760" cy="746760"/>
           </a:xfrm>
           <a:prstGeom prst="roundRect">
             <a:avLst>
-              <a:gd name="adj" fmla="val 24000"/>
+              <a:gd name="adj" fmla="val 17143"/>
             </a:avLst>
           </a:prstGeom>
           <a:solidFill>
@@ -9314,7 +9314,7 @@
               <a:buNone/>
             </a:pPr>
             <a:r>
-              <a:rPr lang="ko-KR" altLang="en-US" sz="2300" b="1" dirty="0">
+              <a:rPr lang="ko-KR" altLang="en-US" sz="3200" b="1" dirty="0">
                 <a:solidFill>
                   <a:srgbClr val="1F2937"/>
                 </a:solidFill>
@@ -9324,7 +9324,7 @@
               </a:rPr>
               <a:t>▲</a:t>
             </a:r>
-            <a:endParaRPr lang="ko-KR" sz="2300" dirty="0"/>
+            <a:endParaRPr lang="ko-KR" sz="3200" dirty="0"/>
           </a:p>
         </p:txBody>
       </p:sp>
@@ -9336,12 +9336,12 @@
         </p:nvSpPr>
         <p:spPr>
           <a:xfrm>
-            <a:off x="2813304" y="2476500"/>
-            <a:ext cx="533400" cy="533400"/>
+            <a:off x="3240024" y="2644140"/>
+            <a:ext cx="746760" cy="746760"/>
           </a:xfrm>
           <a:prstGeom prst="roundRect">
             <a:avLst>
-              <a:gd name="adj" fmla="val 24000"/>
+              <a:gd name="adj" fmla="val 17143"/>
             </a:avLst>
           </a:prstGeom>
           <a:solidFill>
@@ -9361,7 +9361,7 @@
               <a:buNone/>
             </a:pPr>
             <a:r>
-              <a:rPr lang="ko-KR" altLang="en-US" sz="2300" b="1" dirty="0">
+              <a:rPr lang="ko-KR" altLang="en-US" sz="3200" b="1" dirty="0">
                 <a:solidFill>
                   <a:srgbClr val="1F2937"/>
                 </a:solidFill>
@@ -9371,7 +9371,7 @@
               </a:rPr>
               <a:t>●</a:t>
             </a:r>
-            <a:endParaRPr lang="ko-KR" sz="2300" dirty="0"/>
+            <a:endParaRPr lang="ko-KR" sz="3200" dirty="0"/>
           </a:p>
         </p:txBody>
       </p:sp>
@@ -9383,12 +9383,12 @@
         </p:nvSpPr>
         <p:spPr>
           <a:xfrm>
-            <a:off x="3547872" y="2476500"/>
-            <a:ext cx="533400" cy="533400"/>
+            <a:off x="4187952" y="2644140"/>
+            <a:ext cx="746760" cy="746760"/>
           </a:xfrm>
           <a:prstGeom prst="roundRect">
             <a:avLst>
-              <a:gd name="adj" fmla="val 24000"/>
+              <a:gd name="adj" fmla="val 17143"/>
             </a:avLst>
           </a:prstGeom>
           <a:solidFill>
@@ -9408,7 +9408,7 @@
               <a:buNone/>
             </a:pPr>
             <a:r>
-              <a:rPr lang="ko-KR" altLang="en-US" sz="2300" b="1" dirty="0">
+              <a:rPr lang="ko-KR" altLang="en-US" sz="3200" b="1" dirty="0">
                 <a:solidFill>
                   <a:srgbClr val="1F2937"/>
                 </a:solidFill>
@@ -9418,7 +9418,7 @@
               </a:rPr>
               <a:t>■</a:t>
             </a:r>
-            <a:endParaRPr lang="ko-KR" sz="2300" dirty="0"/>
+            <a:endParaRPr lang="ko-KR" sz="3200" dirty="0"/>
           </a:p>
         </p:txBody>
       </p:sp>
@@ -9430,12 +9430,12 @@
         </p:nvSpPr>
         <p:spPr>
           <a:xfrm>
-            <a:off x="4282440" y="2476500"/>
-            <a:ext cx="533400" cy="533400"/>
+            <a:off x="5135880" y="2644140"/>
+            <a:ext cx="746760" cy="746760"/>
           </a:xfrm>
           <a:prstGeom prst="roundRect">
             <a:avLst>
-              <a:gd name="adj" fmla="val 24000"/>
+              <a:gd name="adj" fmla="val 17143"/>
             </a:avLst>
           </a:prstGeom>
           <a:solidFill>
@@ -9455,7 +9455,7 @@
               <a:buNone/>
             </a:pPr>
             <a:r>
-              <a:rPr lang="ko-KR" altLang="en-US" sz="2300" b="1" dirty="0">
+              <a:rPr lang="ko-KR" altLang="en-US" sz="3200" b="1" dirty="0">
                 <a:solidFill>
                   <a:srgbClr val="1F2937"/>
                 </a:solidFill>
@@ -9465,7 +9465,7 @@
               </a:rPr>
               <a:t>●</a:t>
             </a:r>
-            <a:endParaRPr lang="ko-KR" sz="2300" dirty="0"/>
+            <a:endParaRPr lang="ko-KR" sz="3200" dirty="0"/>
           </a:p>
         </p:txBody>
       </p:sp>
@@ -9477,12 +9477,12 @@
         </p:nvSpPr>
         <p:spPr>
           <a:xfrm>
-            <a:off x="5017008" y="2476500"/>
-            <a:ext cx="533400" cy="533400"/>
+            <a:off x="6083808" y="2644140"/>
+            <a:ext cx="746760" cy="746760"/>
           </a:xfrm>
           <a:prstGeom prst="roundRect">
             <a:avLst>
-              <a:gd name="adj" fmla="val 24000"/>
+              <a:gd name="adj" fmla="val 17143"/>
             </a:avLst>
           </a:prstGeom>
           <a:solidFill>
@@ -9502,7 +9502,7 @@
               <a:buNone/>
             </a:pPr>
             <a:r>
-              <a:rPr lang="ko-KR" altLang="en-US" sz="2300" b="1" dirty="0">
+              <a:rPr lang="ko-KR" altLang="en-US" sz="3200" b="1" dirty="0">
                 <a:solidFill>
                   <a:srgbClr val="1F2937"/>
                 </a:solidFill>
@@ -9512,7 +9512,7 @@
               </a:rPr>
               <a:t>▲</a:t>
             </a:r>
-            <a:endParaRPr lang="ko-KR" sz="2300" dirty="0"/>
+            <a:endParaRPr lang="ko-KR" sz="3200" dirty="0"/>
           </a:p>
         </p:txBody>
       </p:sp>

--- a/dist/초2/수학/자료와규칙/초2_수학_자료와규칙_02_표와그래프.pptx
+++ b/dist/초2/수학/자료와규칙/초2_수학_자료와규칙_02_표와그래프.pptx
@@ -121,13 +121,13 @@
   <p:extLst>
     <p:ext uri="{521415D9-36F7-43E2-AB2F-B90AF26B5E84}">
       <p14:sectionLst xmlns:p14="http://schemas.microsoft.com/office/powerpoint/2010/main">
-        <p14:section name="도입" id="{f646fc01-ff40-b610-175e-908760473dfa}">
+        <p14:section name="도입" id="{3360155d-e03d-9d99-4837-16a2166cb146}">
           <p14:sldIdLst>
             <p14:sldId id="256"/>
             <p14:sldId id="257"/>
           </p14:sldIdLst>
         </p14:section>
-        <p14:section name="개념" id="{846f67d8-1a78-f1a9-8834-769e750b6d57}">
+        <p14:section name="개념" id="{8d57123e-6b16-3b28-abe5-91d11554fef3}">
           <p14:sldIdLst>
             <p14:sldId id="258"/>
             <p14:sldId id="259"/>
@@ -135,7 +135,7 @@
             <p14:sldId id="261"/>
           </p14:sldIdLst>
         </p14:section>
-        <p14:section name="연습" id="{ea9913b4-7e60-0f46-05f7-23888af45121}">
+        <p14:section name="연습" id="{5459e997-b8a6-62fa-b423-bab63059ce06}">
           <p14:sldIdLst>
             <p14:sldId id="262"/>
             <p14:sldId id="263"/>
@@ -143,19 +143,19 @@
             <p14:sldId id="265"/>
           </p14:sldIdLst>
         </p14:section>
-        <p14:section name="확인" id="{3c691de9-c3ce-b1e9-30ad-489e9d6f20f0}">
+        <p14:section name="확인" id="{56f03c0d-8eb6-62f0-a5a6-fa9d7a18b313}">
           <p14:sldIdLst>
             <p14:sldId id="266"/>
             <p14:sldId id="267"/>
             <p14:sldId id="268"/>
           </p14:sldIdLst>
         </p14:section>
-        <p14:section name="정리" id="{60c3295a-83a9-c368-5fc2-d48a95ef6538}">
+        <p14:section name="정리" id="{fca3ac53-ab1b-5749-ea4e-62238cf61752}">
           <p14:sldIdLst>
             <p14:sldId id="269"/>
           </p14:sldIdLst>
         </p14:section>
-        <p14:section name="보충" id="{f60a09a3-b0fc-4a67-da34-96b93ce6f957}">
+        <p14:section name="보충" id="{a1d62748-484d-0bc2-5b28-61c4281145b9}">
           <p14:sldIdLst>
             <p14:sldId id="270"/>
           </p14:sldIdLst>
@@ -5790,7 +5790,7 @@
           </p:nvPr>
         </p:nvGraphicFramePr>
         <p:xfrm>
-          <a:off x="6254496" y="3037840"/>
+          <a:off x="6254496" y="3054350"/>
           <a:ext cx="5385816" cy="914400"/>
         </p:xfrm>
         <a:graphic>
@@ -5804,7 +5804,7 @@
                 <a:gridCol w="969447"/>
                 <a:gridCol w="969447"/>
               </a:tblGrid>
-              <a:tr h="528320">
+              <a:tr h="511810">
                 <a:tc>
                   <a:txBody>
                     <a:bodyPr/>
@@ -6146,7 +6146,7 @@
                   </a:tcPr>
                 </a:tc>
               </a:tr>
-              <a:tr h="528320">
+              <a:tr h="511810">
                 <a:tc>
                   <a:txBody>
                     <a:bodyPr/>
@@ -6703,7 +6703,7 @@
               <a:buNone/>
             </a:pPr>
             <a:r>
-              <a:rPr lang="ko-KR" altLang="en-US" sz="2600" dirty="0">
+              <a:rPr lang="ko-KR" altLang="en-US" sz="3200" dirty="0">
                 <a:solidFill>
                   <a:srgbClr val="1F2937"/>
                 </a:solidFill>
@@ -6711,9 +6711,9 @@
                 <a:ea typeface="맑은 고딕" pitchFamily="34" charset="-122"/>
                 <a:cs typeface="맑은 고딕" pitchFamily="34" charset="-120"/>
               </a:rPr>
-              <a:t>5, 4, 2, 합계 11</a:t>
+              <a:t>표 5, 4, 2</a:t>
             </a:r>
-            <a:endParaRPr lang="ko-KR" sz="2600" dirty="0"/>
+            <a:endParaRPr lang="ko-KR" sz="3200" dirty="0"/>
           </a:p>
         </p:txBody>
       </p:sp>
@@ -6750,7 +6750,7 @@
                 <a:ea typeface="맑은 고딕" pitchFamily="34" charset="-122"/>
                 <a:cs typeface="맑은 고딕" pitchFamily="34" charset="-120"/>
               </a:rPr>
-              <a:t>과자, 빵, 떡</a:t>
+              <a:t>합계 11</a:t>
             </a:r>
             <a:endParaRPr lang="ko-KR" sz="2600" dirty="0"/>
           </a:p>
@@ -8177,11 +8177,11 @@
         <p:spPr>
           <a:xfrm>
             <a:off x="548640" y="1325880"/>
-            <a:ext cx="11091672" cy="868680"/>
+            <a:ext cx="11091672" cy="1320800"/>
           </a:xfrm>
           <a:prstGeom prst="roundRect">
             <a:avLst>
-              <a:gd name="adj" fmla="val 12632"/>
+              <a:gd name="adj" fmla="val 8308"/>
             </a:avLst>
           </a:prstGeom>
           <a:solidFill>
@@ -8204,7 +8204,7 @@
         <p:spPr>
           <a:xfrm>
             <a:off x="822960" y="1463040"/>
-            <a:ext cx="10543032" cy="594360"/>
+            <a:ext cx="10543032" cy="1046480"/>
           </a:xfrm>
           <a:prstGeom prst="rect">
             <a:avLst/>
@@ -8245,7 +8245,7 @@
         </p:nvSpPr>
         <p:spPr>
           <a:xfrm>
-            <a:off x="548640" y="2423160"/>
+            <a:off x="548640" y="2875280"/>
             <a:ext cx="5431536" cy="594360"/>
           </a:xfrm>
           <a:prstGeom prst="roundRect">
@@ -8292,7 +8292,7 @@
         </p:nvSpPr>
         <p:spPr>
           <a:xfrm>
-            <a:off x="6208776" y="2423160"/>
+            <a:off x="6208776" y="2875280"/>
             <a:ext cx="5431536" cy="594360"/>
           </a:xfrm>
           <a:prstGeom prst="roundRect">
@@ -8339,7 +8339,7 @@
         </p:nvSpPr>
         <p:spPr>
           <a:xfrm>
-            <a:off x="548640" y="3246120"/>
+            <a:off x="548640" y="3698240"/>
             <a:ext cx="11091672" cy="457200"/>
           </a:xfrm>
           <a:prstGeom prst="rect">
@@ -8378,8 +8378,8 @@
         </p:nvSpPr>
         <p:spPr>
           <a:xfrm>
-            <a:off x="548640" y="3749040"/>
-            <a:ext cx="3544824" cy="1828800"/>
+            <a:off x="548640" y="4201160"/>
+            <a:ext cx="3544824" cy="1376680"/>
           </a:xfrm>
           <a:prstGeom prst="rect">
             <a:avLst/>
@@ -8434,8 +8434,8 @@
         </p:nvSpPr>
         <p:spPr>
           <a:xfrm>
-            <a:off x="4322064" y="3749040"/>
-            <a:ext cx="3544824" cy="1828800"/>
+            <a:off x="4322064" y="4201160"/>
+            <a:ext cx="3544824" cy="1376680"/>
           </a:xfrm>
           <a:prstGeom prst="rect">
             <a:avLst/>
@@ -8490,8 +8490,8 @@
         </p:nvSpPr>
         <p:spPr>
           <a:xfrm>
-            <a:off x="8095488" y="3749040"/>
-            <a:ext cx="3544824" cy="1828800"/>
+            <a:off x="8095488" y="4201160"/>
+            <a:ext cx="3544824" cy="1376680"/>
           </a:xfrm>
           <a:prstGeom prst="rect">
             <a:avLst/>
@@ -10739,7 +10739,7 @@
           </p:nvPr>
         </p:nvGraphicFramePr>
         <p:xfrm>
-          <a:off x="1156716" y="2820162"/>
+          <a:off x="1156716" y="2836672"/>
           <a:ext cx="9875520" cy="914400"/>
         </p:xfrm>
         <a:graphic>
@@ -10754,7 +10754,7 @@
                 <a:gridCol w="1422075"/>
                 <a:gridCol w="1422075"/>
               </a:tblGrid>
-              <a:tr h="528320">
+              <a:tr h="511810">
                 <a:tc>
                   <a:txBody>
                     <a:bodyPr/>
@@ -11164,7 +11164,7 @@
                   </a:tcPr>
                 </a:tc>
               </a:tr>
-              <a:tr h="528320">
+              <a:tr h="511810">
                 <a:tc>
                   <a:txBody>
                     <a:bodyPr/>
@@ -14833,7 +14833,7 @@
           </p:nvPr>
         </p:nvGraphicFramePr>
         <p:xfrm>
-          <a:off x="6254496" y="3037840"/>
+          <a:off x="6254496" y="3054350"/>
           <a:ext cx="5385816" cy="914400"/>
         </p:xfrm>
         <a:graphic>
@@ -14847,7 +14847,7 @@
                 <a:gridCol w="969447"/>
                 <a:gridCol w="969447"/>
               </a:tblGrid>
-              <a:tr h="528320">
+              <a:tr h="511810">
                 <a:tc>
                   <a:txBody>
                     <a:bodyPr/>
@@ -15189,7 +15189,7 @@
                   </a:tcPr>
                 </a:tc>
               </a:tr>
-              <a:tr h="528320">
+              <a:tr h="511810">
                 <a:tc>
                   <a:txBody>
                     <a:bodyPr/>
